--- a/assets/pptx/catalog-707.pptx
+++ b/assets/pptx/catalog-707.pptx
@@ -3323,7 +3323,7 @@
                 <a:ea typeface="Ebrima"/>
                 <a:cs typeface="Ebrima"/>
               </a:rPr>
-              <a:t>የፍጥረት ፈጣሪ :ተባርክ ብያለሁ (2x)</a:t>
+              <a:t>የፍጥረት ፈጣሪ :ተባርክ ብያለሁ 2x</a:t>
             </a:r>
           </a:p>
         </p:txBody>
@@ -3480,7 +3480,7 @@
                 <a:ea typeface="Ebrima"/>
                 <a:cs typeface="Ebrima"/>
               </a:rPr>
-              <a:t>አንጐራጉራለሁ አንጐራጉራለሁ (2x)</a:t>
+              <a:t>አንጐራጉራለሁ አንጐራጉራለሁ 2x</a:t>
             </a:r>
           </a:p>
         </p:txBody>
@@ -3614,7 +3614,7 @@
                 <a:ea typeface="Ebrima"/>
                 <a:cs typeface="Ebrima"/>
               </a:rPr>
-              <a:t>በላይ ሠማይ ቢሆን በታች በምድርም (2x)</a:t>
+              <a:t>በላይ ሠማይ ቢሆን በታች በምድርም 2x</a:t>
             </a:r>
           </a:p>
         </p:txBody>
@@ -3748,7 +3748,7 @@
                 <a:ea typeface="Ebrima"/>
                 <a:cs typeface="Ebrima"/>
               </a:rPr>
-              <a:t>አቤት አቤት ሥራው እግዚአብሔር ጌታ ነው (2x)</a:t>
+              <a:t>አቤት አቤት ሥራው እግዚአብሔር ጌታ ነው 2x</a:t>
             </a:r>
           </a:p>
         </p:txBody>
@@ -3905,7 +3905,7 @@
                 <a:ea typeface="Ebrima"/>
                 <a:cs typeface="Ebrima"/>
               </a:rPr>
-              <a:t>አንጐራጉራለሁ አንጐራጉራለሁ (2x)</a:t>
+              <a:t>አንጐራጉራለሁ አንጐራጉራለሁ 2x</a:t>
             </a:r>
           </a:p>
         </p:txBody>
@@ -4062,7 +4062,7 @@
                 <a:ea typeface="Ebrima"/>
                 <a:cs typeface="Ebrima"/>
               </a:rPr>
-              <a:t>አንጐራጉራለሁ አንጐራጉራለሁ (2x)</a:t>
+              <a:t>አንጐራጉራለሁ አንጐራጉራለሁ 2x</a:t>
             </a:r>
           </a:p>
         </p:txBody>
@@ -4196,7 +4196,7 @@
                 <a:ea typeface="Ebrima"/>
                 <a:cs typeface="Ebrima"/>
               </a:rPr>
-              <a:t>ጌታን ከልብ ሆኜ አመሰግናለሁ (2x)</a:t>
+              <a:t>ጌታን ከልብ ሆኜ አመሰግናለሁ 2x</a:t>
             </a:r>
           </a:p>
         </p:txBody>
@@ -4330,7 +4330,7 @@
                 <a:ea typeface="Ebrima"/>
                 <a:cs typeface="Ebrima"/>
               </a:rPr>
-              <a:t>እዘምራለሁኝ ለጌታዏ ክብር (2x)</a:t>
+              <a:t>እዘምራለሁኝ ለጌታዏ ክብር 2x</a:t>
             </a:r>
           </a:p>
         </p:txBody>
@@ -4487,7 +4487,7 @@
                 <a:ea typeface="Ebrima"/>
                 <a:cs typeface="Ebrima"/>
               </a:rPr>
-              <a:t>አንጐራጉራለሁ አንጐራጉራለሁ (2x)</a:t>
+              <a:t>አንጐራጉራለሁ አንጐራጉራለሁ 2x</a:t>
             </a:r>
           </a:p>
         </p:txBody>
@@ -4621,7 +4621,7 @@
                 <a:ea typeface="Ebrima"/>
                 <a:cs typeface="Ebrima"/>
               </a:rPr>
-              <a:t>የዓለምን ተራሮች በቃልህ አጸናህ (2x)</a:t>
+              <a:t>የዓለምን ተራሮች በቃልህ አጸናህ 2x</a:t>
             </a:r>
           </a:p>
         </p:txBody>
